--- a/liveries/nsi/template.pptx
+++ b/liveries/nsi/template.pptx
@@ -3405,5 +3405,31 @@
   </a:themeElements>
   <a:objectDefaults/>
   <a:extraClrSchemeLst/>
+  <a:custClrLst>
+    <a:custClr name="Data 1 · Gold">
+      <a:srgbClr val="AD8E38"/>
+    </a:custClr>
+    <a:custClr name="Data 2 · Blue">
+      <a:srgbClr val="096FAE"/>
+    </a:custClr>
+    <a:custClr name="Data 3 · Brown">
+      <a:srgbClr val="7D4000"/>
+    </a:custClr>
+    <a:custClr name="Data 4 · Teal">
+      <a:srgbClr val="00A2AE"/>
+    </a:custClr>
+    <a:custClr name="Data 5 · Magenta">
+      <a:srgbClr val="7A3270"/>
+    </a:custClr>
+    <a:custClr name="Data 6 · Green">
+      <a:srgbClr val="6C7300"/>
+    </a:custClr>
+    <a:custClr name="Data 7 · Blue">
+      <a:srgbClr val="6382D3"/>
+    </a:custClr>
+    <a:custClr name="Data 8 · Teal">
+      <a:srgbClr val="007E67"/>
+    </a:custClr>
+  </a:custClrLst>
 </a:theme>
 </file>
--- a/liveries/nsi/template.pptx
+++ b/liveries/nsi/template.pptx
@@ -3412,23 +3412,23 @@
     <a:custClr name="Data 2 · Blue">
       <a:srgbClr val="096FAE"/>
     </a:custClr>
-    <a:custClr name="Data 3 · Brown">
-      <a:srgbClr val="7D4000"/>
+    <a:custClr name="Data 3 · Red">
+      <a:srgbClr val="9C3F29"/>
     </a:custClr>
     <a:custClr name="Data 4 · Teal">
       <a:srgbClr val="00A2AE"/>
     </a:custClr>
-    <a:custClr name="Data 5 · Magenta">
-      <a:srgbClr val="7A3270"/>
+    <a:custClr name="Data 5 · Blue">
+      <a:srgbClr val="334C98"/>
     </a:custClr>
-    <a:custClr name="Data 6 · Green">
-      <a:srgbClr val="6C7300"/>
+    <a:custClr name="Data 6 · Orange">
+      <a:srgbClr val="A86100"/>
     </a:custClr>
-    <a:custClr name="Data 7 · Blue">
-      <a:srgbClr val="6382D3"/>
+    <a:custClr name="Data 7 · Pink">
+      <a:srgbClr val="812F62"/>
     </a:custClr>
-    <a:custClr name="Data 8 · Teal">
-      <a:srgbClr val="007E67"/>
+    <a:custClr name="Data 8 · Pink">
+      <a:srgbClr val="BC5969"/>
     </a:custClr>
   </a:custClrLst>
 </a:theme>

--- a/liveries/nsi/template.pptx
+++ b/liveries/nsi/template.pptx
@@ -3409,26 +3409,26 @@
     <a:custClr name="Data 1 · Gold">
       <a:srgbClr val="AD8E38"/>
     </a:custClr>
-    <a:custClr name="Data 2 · Blue">
+    <a:custClr name="Data 2 · Red">
+      <a:srgbClr val="9C3F29"/>
+    </a:custClr>
+    <a:custClr name="Data 3 · Blue">
       <a:srgbClr val="096FAE"/>
     </a:custClr>
-    <a:custClr name="Data 3 · Red">
-      <a:srgbClr val="9C3F29"/>
+    <a:custClr name="Data 4 · Green">
+      <a:srgbClr val="7A9C51"/>
     </a:custClr>
-    <a:custClr name="Data 4 · Teal">
-      <a:srgbClr val="00A2AE"/>
+    <a:custClr name="Data 5 · Pink">
+      <a:srgbClr val="812F62"/>
     </a:custClr>
-    <a:custClr name="Data 5 · Blue">
+    <a:custClr name="Data 6 · Teal">
+      <a:srgbClr val="00A1B8"/>
+    </a:custClr>
+    <a:custClr name="Data 7 · Blue">
       <a:srgbClr val="334C98"/>
     </a:custClr>
-    <a:custClr name="Data 6 · Orange">
-      <a:srgbClr val="A86100"/>
-    </a:custClr>
-    <a:custClr name="Data 7 · Pink">
-      <a:srgbClr val="812F62"/>
-    </a:custClr>
-    <a:custClr name="Data 8 · Pink">
-      <a:srgbClr val="BC5969"/>
+    <a:custClr name="Data 8 · Teal">
+      <a:srgbClr val="008777"/>
     </a:custClr>
   </a:custClrLst>
 </a:theme>

--- a/liveries/nsi/template.pptx
+++ b/liveries/nsi/template.pptx
@@ -3409,26 +3409,26 @@
     <a:custClr name="Data 1 · Gold">
       <a:srgbClr val="AD8E38"/>
     </a:custClr>
-    <a:custClr name="Data 2 · Blue">
+    <a:custClr name="Data 2 · Red">
+      <a:srgbClr val="9C3F29"/>
+    </a:custClr>
+    <a:custClr name="Data 3 · Blue">
       <a:srgbClr val="096FAE"/>
     </a:custClr>
-    <a:custClr name="Data 3 · Brown">
-      <a:srgbClr val="7D4000"/>
+    <a:custClr name="Data 4 · Green">
+      <a:srgbClr val="7A9C51"/>
     </a:custClr>
-    <a:custClr name="Data 4 · Teal">
-      <a:srgbClr val="00A2AE"/>
+    <a:custClr name="Data 5 · Pink">
+      <a:srgbClr val="812F62"/>
     </a:custClr>
-    <a:custClr name="Data 5 · Magenta">
-      <a:srgbClr val="7A3270"/>
-    </a:custClr>
-    <a:custClr name="Data 6 · Green">
-      <a:srgbClr val="6C7300"/>
+    <a:custClr name="Data 6 · Teal">
+      <a:srgbClr val="00A1B8"/>
     </a:custClr>
     <a:custClr name="Data 7 · Blue">
-      <a:srgbClr val="6382D3"/>
+      <a:srgbClr val="334C98"/>
     </a:custClr>
     <a:custClr name="Data 8 · Teal">
-      <a:srgbClr val="007E67"/>
+      <a:srgbClr val="008777"/>
     </a:custClr>
   </a:custClrLst>
 </a:theme>

--- a/liveries/nsi/template.pptx
+++ b/liveries/nsi/template.pptx
@@ -785,8 +785,8 @@
         </p:nvSpPr>
         <p:spPr>
           <a:xfrm>
-            <a:off x="731520" y="1352398"/>
-            <a:ext cx="10728960" cy="4972050"/>
+            <a:off x="731520" y="1353083"/>
+            <a:ext cx="10728960" cy="4971364"/>
           </a:xfrm>
           <a:prstGeom prst="rect">
             <a:avLst/>
@@ -1258,8 +1258,8 @@
         </p:nvSpPr>
         <p:spPr>
           <a:xfrm>
-            <a:off x="731520" y="1352398"/>
-            <a:ext cx="5181600" cy="4972050"/>
+            <a:off x="731520" y="1353083"/>
+            <a:ext cx="5181600" cy="4971364"/>
           </a:xfrm>
           <a:prstGeom prst="rect">
             <a:avLst/>
@@ -1288,8 +1288,8 @@
         </p:nvSpPr>
         <p:spPr>
           <a:xfrm>
-            <a:off x="6278880" y="1352398"/>
-            <a:ext cx="5181600" cy="4972050"/>
+            <a:off x="6278880" y="1353083"/>
+            <a:ext cx="5181600" cy="4971364"/>
           </a:xfrm>
           <a:prstGeom prst="rect">
             <a:avLst/>
@@ -1480,7 +1480,7 @@
         </p:nvSpPr>
         <p:spPr>
           <a:xfrm>
-            <a:off x="731520" y="1352398"/>
+            <a:off x="731520" y="1353083"/>
             <a:ext cx="5181600" cy="617220"/>
           </a:xfrm>
           <a:prstGeom prst="rect">
@@ -1521,8 +1521,8 @@
         </p:nvSpPr>
         <p:spPr>
           <a:xfrm>
-            <a:off x="731520" y="2038198"/>
-            <a:ext cx="5181600" cy="4286250"/>
+            <a:off x="731520" y="2038883"/>
+            <a:ext cx="5181600" cy="4285564"/>
           </a:xfrm>
           <a:prstGeom prst="rect">
             <a:avLst/>
@@ -1551,7 +1551,7 @@
         </p:nvSpPr>
         <p:spPr>
           <a:xfrm>
-            <a:off x="6278880" y="1352398"/>
+            <a:off x="6278880" y="1353083"/>
             <a:ext cx="5181600" cy="617220"/>
           </a:xfrm>
           <a:prstGeom prst="rect">
@@ -1592,8 +1592,8 @@
         </p:nvSpPr>
         <p:spPr>
           <a:xfrm>
-            <a:off x="6278880" y="2038198"/>
-            <a:ext cx="5181600" cy="4286250"/>
+            <a:off x="6278880" y="2038883"/>
+            <a:ext cx="5181600" cy="4285564"/>
           </a:xfrm>
           <a:prstGeom prst="rect">
             <a:avLst/>
@@ -1758,7 +1758,7 @@
         </p:nvSpPr>
         <p:spPr>
           <a:xfrm>
-            <a:off x="731520" y="1352398"/>
+            <a:off x="731520" y="1353083"/>
             <a:ext cx="4023360" cy="891540"/>
           </a:xfrm>
           <a:prstGeom prst="rect">
@@ -1794,8 +1794,8 @@
         </p:nvSpPr>
         <p:spPr>
           <a:xfrm>
-            <a:off x="5120640" y="1352398"/>
-            <a:ext cx="6339840" cy="4972050"/>
+            <a:off x="5120640" y="1353083"/>
+            <a:ext cx="6339840" cy="4971364"/>
           </a:xfrm>
           <a:prstGeom prst="rect">
             <a:avLst/>
@@ -1824,8 +1824,8 @@
         </p:nvSpPr>
         <p:spPr>
           <a:xfrm>
-            <a:off x="731520" y="2312518"/>
-            <a:ext cx="4023360" cy="4011930"/>
+            <a:off x="731520" y="2313203"/>
+            <a:ext cx="4023360" cy="4011244"/>
           </a:xfrm>
           <a:prstGeom prst="rect">
             <a:avLst/>
@@ -2830,8 +2830,8 @@
         </p:nvSpPr>
         <p:spPr>
           <a:xfrm>
-            <a:off x="2181949" y="336042"/>
-            <a:ext cx="9278531" cy="654253"/>
+            <a:off x="2181949" y="335356"/>
+            <a:ext cx="9278531" cy="533552"/>
           </a:xfrm>
           <a:prstGeom prst="rect">
             <a:avLst/>
@@ -2862,8 +2862,8 @@
         </p:nvSpPr>
         <p:spPr>
           <a:xfrm>
-            <a:off x="731520" y="1352398"/>
-            <a:ext cx="10728960" cy="4972050"/>
+            <a:off x="731520" y="1353083"/>
+            <a:ext cx="10728960" cy="4971364"/>
           </a:xfrm>
           <a:prstGeom prst="rect">
             <a:avLst/>

--- a/liveries/nsi/template.pptx
+++ b/liveries/nsi/template.pptx
@@ -210,7 +210,7 @@
                 <a:spcPts val="0"/>
               </a:spcBef>
               <a:buNone/>
-              <a:defRPr sz="2800" b="1" cap="all">
+              <a:defRPr sz="2800" b="1" cap="all" spc="224">
                 <a:solidFill>
                   <a:srgbClr val="000000"/>
                 </a:solidFill>
@@ -2564,7 +2564,7 @@
                 <a:spcPts val="0"/>
               </a:spcBef>
               <a:buNone/>
-              <a:defRPr sz="2800" b="1" cap="all">
+              <a:defRPr sz="2800" b="1" cap="all" spc="224">
                 <a:solidFill>
                   <a:srgbClr val="000000"/>
                 </a:solidFill>

--- a/liveries/nsi/template.pptx
+++ b/liveries/nsi/template.pptx
@@ -210,7 +210,7 @@
                 <a:spcPts val="0"/>
               </a:spcBef>
               <a:buNone/>
-              <a:defRPr sz="2800" b="1" cap="all">
+              <a:defRPr sz="2800" b="1" cap="all" spc="224">
                 <a:solidFill>
                   <a:srgbClr val="000000"/>
                 </a:solidFill>
@@ -785,8 +785,8 @@
         </p:nvSpPr>
         <p:spPr>
           <a:xfrm>
-            <a:off x="731520" y="1352398"/>
-            <a:ext cx="10728960" cy="4972050"/>
+            <a:off x="731520" y="1353083"/>
+            <a:ext cx="10728960" cy="4971364"/>
           </a:xfrm>
           <a:prstGeom prst="rect">
             <a:avLst/>
@@ -1258,8 +1258,8 @@
         </p:nvSpPr>
         <p:spPr>
           <a:xfrm>
-            <a:off x="731520" y="1352398"/>
-            <a:ext cx="5181600" cy="4972050"/>
+            <a:off x="731520" y="1353083"/>
+            <a:ext cx="5181600" cy="4971364"/>
           </a:xfrm>
           <a:prstGeom prst="rect">
             <a:avLst/>
@@ -1288,8 +1288,8 @@
         </p:nvSpPr>
         <p:spPr>
           <a:xfrm>
-            <a:off x="6278880" y="1352398"/>
-            <a:ext cx="5181600" cy="4972050"/>
+            <a:off x="6278880" y="1353083"/>
+            <a:ext cx="5181600" cy="4971364"/>
           </a:xfrm>
           <a:prstGeom prst="rect">
             <a:avLst/>
@@ -1480,7 +1480,7 @@
         </p:nvSpPr>
         <p:spPr>
           <a:xfrm>
-            <a:off x="731520" y="1352398"/>
+            <a:off x="731520" y="1353083"/>
             <a:ext cx="5181600" cy="617220"/>
           </a:xfrm>
           <a:prstGeom prst="rect">
@@ -1521,8 +1521,8 @@
         </p:nvSpPr>
         <p:spPr>
           <a:xfrm>
-            <a:off x="731520" y="2038198"/>
-            <a:ext cx="5181600" cy="4286250"/>
+            <a:off x="731520" y="2038883"/>
+            <a:ext cx="5181600" cy="4285564"/>
           </a:xfrm>
           <a:prstGeom prst="rect">
             <a:avLst/>
@@ -1551,7 +1551,7 @@
         </p:nvSpPr>
         <p:spPr>
           <a:xfrm>
-            <a:off x="6278880" y="1352398"/>
+            <a:off x="6278880" y="1353083"/>
             <a:ext cx="5181600" cy="617220"/>
           </a:xfrm>
           <a:prstGeom prst="rect">
@@ -1592,8 +1592,8 @@
         </p:nvSpPr>
         <p:spPr>
           <a:xfrm>
-            <a:off x="6278880" y="2038198"/>
-            <a:ext cx="5181600" cy="4286250"/>
+            <a:off x="6278880" y="2038883"/>
+            <a:ext cx="5181600" cy="4285564"/>
           </a:xfrm>
           <a:prstGeom prst="rect">
             <a:avLst/>
@@ -1758,7 +1758,7 @@
         </p:nvSpPr>
         <p:spPr>
           <a:xfrm>
-            <a:off x="731520" y="1352398"/>
+            <a:off x="731520" y="1353083"/>
             <a:ext cx="4023360" cy="891540"/>
           </a:xfrm>
           <a:prstGeom prst="rect">
@@ -1794,8 +1794,8 @@
         </p:nvSpPr>
         <p:spPr>
           <a:xfrm>
-            <a:off x="5120640" y="1352398"/>
-            <a:ext cx="6339840" cy="4972050"/>
+            <a:off x="5120640" y="1353083"/>
+            <a:ext cx="6339840" cy="4971364"/>
           </a:xfrm>
           <a:prstGeom prst="rect">
             <a:avLst/>
@@ -1824,8 +1824,8 @@
         </p:nvSpPr>
         <p:spPr>
           <a:xfrm>
-            <a:off x="731520" y="2312518"/>
-            <a:ext cx="4023360" cy="4011930"/>
+            <a:off x="731520" y="2313203"/>
+            <a:ext cx="4023360" cy="4011244"/>
           </a:xfrm>
           <a:prstGeom prst="rect">
             <a:avLst/>
@@ -2564,7 +2564,7 @@
                 <a:spcPts val="0"/>
               </a:spcBef>
               <a:buNone/>
-              <a:defRPr sz="2800" b="1" cap="all">
+              <a:defRPr sz="2800" b="1" cap="all" spc="224">
                 <a:solidFill>
                   <a:srgbClr val="000000"/>
                 </a:solidFill>
@@ -2830,8 +2830,8 @@
         </p:nvSpPr>
         <p:spPr>
           <a:xfrm>
-            <a:off x="2181949" y="336042"/>
-            <a:ext cx="9278531" cy="654253"/>
+            <a:off x="2181949" y="335356"/>
+            <a:ext cx="9278531" cy="533552"/>
           </a:xfrm>
           <a:prstGeom prst="rect">
             <a:avLst/>
@@ -2862,8 +2862,8 @@
         </p:nvSpPr>
         <p:spPr>
           <a:xfrm>
-            <a:off x="731520" y="1352398"/>
-            <a:ext cx="10728960" cy="4972050"/>
+            <a:off x="731520" y="1353083"/>
+            <a:ext cx="10728960" cy="4971364"/>
           </a:xfrm>
           <a:prstGeom prst="rect">
             <a:avLst/>
